--- a/docs/Union-web_프로젝트소개.pptx
+++ b/docs/Union-web_프로젝트소개.pptx
@@ -6535,7 +6535,7 @@
         <p:spPr>
           <a:xfrm>
             <a:off x="640080" y="320040"/>
-            <a:ext cx="10515600" cy="365760"/>
+            <a:ext cx="10515600" cy="323165"/>
           </a:xfrm>
           <a:prstGeom prst="rect">
             <a:avLst/>
@@ -6550,14 +6550,29 @@
           <a:p>
             <a:pPr algn="l"/>
             <a:r>
-              <a:rPr sz="1500" b="1">
+              <a:rPr sz="1500" b="1" dirty="0">
                 <a:solidFill>
                   <a:srgbClr val="2BB3A0"/>
                 </a:solidFill>
                 <a:latin typeface="맑은 고딕"/>
               </a:rPr>
-              <a:t>FUTURE PLAN 5 (예고)</a:t>
-            </a:r>
+              <a:t>FUTURE PLAN </a:t>
+            </a:r>
+            <a:r>
+              <a:rPr lang="en-US" sz="1500" b="1" dirty="0">
+                <a:solidFill>
+                  <a:srgbClr val="2BB3A0"/>
+                </a:solidFill>
+                <a:latin typeface="맑은 고딕"/>
+              </a:rPr>
+              <a:t>5</a:t>
+            </a:r>
+            <a:endParaRPr sz="1500" b="1" dirty="0">
+              <a:solidFill>
+                <a:srgbClr val="2BB3A0"/>
+              </a:solidFill>
+              <a:latin typeface="맑은 고딕"/>
+            </a:endParaRPr>
           </a:p>
         </p:txBody>
       </p:sp>
